--- a/docs/valueup-washing-deck.pptx
+++ b/docs/valueup-washing-deck.pptx
@@ -1875,6 +1875,10 @@
           </a:solidFill>
           <a:ln/>
         </p:spPr>
+        <p:txBody>
+          <a:bodyPr/>
+          <a:p/>
+        </p:txBody>
       </p:sp>
       <p:sp>
         <p:nvSpPr>
@@ -1897,6 +1901,10 @@
           </a:solidFill>
           <a:ln/>
         </p:spPr>
+        <p:txBody>
+          <a:bodyPr/>
+          <a:p/>
+        </p:txBody>
       </p:sp>
       <p:sp>
         <p:nvSpPr>
@@ -2291,7 +2299,7 @@
                 <a:ea typeface="Malgun Gothic" pitchFamily="34" charset="-122"/>
                 <a:cs typeface="Malgun Gothic" pitchFamily="34" charset="-120"/>
               </a:rPr>
-              <a:t>김다리아  ·  2026-07  ·  github.com/dariajkim-star/valueup-washing-lab</a:t>
+              <a:t>김다리아  ·  2026-08  ·  github.com/dariajkim-star/valueup-washing-lab</a:t>
             </a:r>
             <a:endParaRPr lang="en-US" sz="1200" dirty="0"/>
           </a:p>
@@ -2428,6 +2436,10 @@
           </a:solidFill>
           <a:ln/>
         </p:spPr>
+        <p:txBody>
+          <a:bodyPr/>
+          <a:p/>
+        </p:txBody>
       </p:sp>
       <p:sp>
         <p:nvSpPr>
@@ -2462,7 +2474,7 @@
                 <a:ea typeface="Malgun Gothic" pitchFamily="34" charset="-122"/>
                 <a:cs typeface="Malgun Gothic" pitchFamily="34" charset="-120"/>
               </a:rPr>
-              <a:t>execution_score 커버리지 (33종목 중 1)</a:t>
+              <a:t>execution_score 커버리지 — 마감 후 해소 (174종목)</a:t>
             </a:r>
             <a:endParaRPr lang="en-US" sz="1350" dirty="0"/>
           </a:p>
@@ -2501,7 +2513,7 @@
                 <a:ea typeface="Malgun Gothic" pitchFamily="34" charset="-122"/>
                 <a:cs typeface="Malgun Gothic" pitchFamily="34" charset="-120"/>
               </a:rPr>
-              <a:t>원인은 원천 데이터(자유서식 공시). 파서 24→42% 개선 후 수확체감 — 정직 노출을 원칙으로 채택</a:t>
+              <a:t>원인은 원천 데이터(자유서식). 처방을 바꿔 해소 — 수동 태깅이 아니라 범위 파싱이 답이었다</a:t>
             </a:r>
             <a:endParaRPr lang="en-US" sz="1150" dirty="0"/>
           </a:p>
@@ -2528,6 +2540,10 @@
           </a:solidFill>
           <a:ln/>
         </p:spPr>
+        <p:txBody>
+          <a:bodyPr/>
+          <a:p/>
+        </p:txBody>
       </p:sp>
       <p:sp>
         <p:nvSpPr>
@@ -2628,6 +2644,10 @@
           </a:solidFill>
           <a:ln/>
         </p:spPr>
+        <p:txBody>
+          <a:bodyPr/>
+          <a:p/>
+        </p:txBody>
       </p:sp>
       <p:sp>
         <p:nvSpPr>
@@ -2728,6 +2748,10 @@
           </a:solidFill>
           <a:ln/>
         </p:spPr>
+        <p:txBody>
+          <a:bodyPr/>
+          <a:p/>
+        </p:txBody>
       </p:sp>
       <p:sp>
         <p:nvSpPr>
@@ -2828,6 +2852,10 @@
           </a:solidFill>
           <a:ln/>
         </p:spPr>
+        <p:txBody>
+          <a:bodyPr/>
+          <a:p/>
+        </p:txBody>
       </p:sp>
       <p:sp>
         <p:nvSpPr>
@@ -2999,6 +3027,10 @@
           </a:solidFill>
           <a:ln/>
         </p:spPr>
+        <p:txBody>
+          <a:bodyPr/>
+          <a:p/>
+        </p:txBody>
       </p:sp>
       <p:sp>
         <p:nvSpPr>
@@ -3076,7 +3108,7 @@
                 <a:ea typeface="Malgun Gothic" pitchFamily="34" charset="-122"/>
                 <a:cs typeface="Malgun Gothic" pitchFamily="34" charset="-120"/>
               </a:rPr>
-              <a:t>execution_score 커버리지 확대</a:t>
+              <a:t>공시일(disclosure timestamp) 수집</a:t>
             </a:r>
             <a:endParaRPr lang="en-US" sz="1600" dirty="0"/>
           </a:p>
@@ -3115,7 +3147,7 @@
                 <a:ea typeface="Malgun Gothic" pitchFamily="34" charset="-122"/>
                 <a:cs typeface="Malgun Gothic" pitchFamily="34" charset="-120"/>
               </a:rPr>
-              <a:t>배당·주주환원율을 목표 필드로 분리 수집 — 파서가 아닌 스키마로 해결. 기대: 산출 1 → 두 자릿수 종목</a:t>
+              <a:t>시점 정합의 마지막 구멍 — 과거 as_of 조회 시 동일연도 후속 분기 혼입 가능. API 문서에 명시 중</a:t>
             </a:r>
             <a:endParaRPr lang="en-US" sz="1200" dirty="0"/>
           </a:p>
@@ -3142,6 +3174,10 @@
           </a:solidFill>
           <a:ln/>
         </p:spPr>
+        <p:txBody>
+          <a:bodyPr/>
+          <a:p/>
+        </p:txBody>
       </p:sp>
       <p:sp>
         <p:nvSpPr>
@@ -3219,7 +3255,7 @@
                 <a:ea typeface="Malgun Gothic" pitchFamily="34" charset="-122"/>
                 <a:cs typeface="Malgun Gothic" pitchFamily="34" charset="-120"/>
               </a:rPr>
-              <a:t>밸류업 목표 파싱 정확도</a:t>
+              <a:t>공시 첨부(PDF/HWP) 수집</a:t>
             </a:r>
             <a:endParaRPr lang="en-US" sz="1600" dirty="0"/>
           </a:p>
@@ -3258,7 +3294,7 @@
                 <a:ea typeface="Malgun Gothic" pitchFamily="34" charset="-122"/>
                 <a:cs typeface="Malgun Gothic" pitchFamily="34" charset="-120"/>
               </a:rPr>
-              <a:t>42%에서 수확체감 — 자동 파서 + 수동 태깅 하이브리드로 전환 (전수 자동화 포기 선언)</a:t>
+              <a:t>대기업이 실계획을 첨부로 제출 — DART OpenAPI로 취득 불가. OCR 층은 구축, 취득이 수동</a:t>
             </a:r>
             <a:endParaRPr lang="en-US" sz="1200" dirty="0"/>
           </a:p>
@@ -3285,6 +3321,10 @@
           </a:solidFill>
           <a:ln/>
         </p:spPr>
+        <p:txBody>
+          <a:bodyPr/>
+          <a:p/>
+        </p:txBody>
       </p:sp>
       <p:sp>
         <p:nvSpPr>
@@ -3362,7 +3402,7 @@
                 <a:ea typeface="Malgun Gothic" pitchFamily="34" charset="-122"/>
                 <a:cs typeface="Malgun Gothic" pitchFamily="34" charset="-120"/>
               </a:rPr>
-              <a:t>유니버스 확대 (조건부)</a:t>
+              <a:t>환원율 정의 재론 (정책 판단)</a:t>
             </a:r>
             <a:endParaRPr lang="en-US" sz="1600" dirty="0"/>
           </a:p>
@@ -3401,7 +3441,7 @@
                 <a:ea typeface="Malgun Gothic" pitchFamily="34" charset="-122"/>
                 <a:cs typeface="Malgun Gothic" pitchFamily="34" charset="-120"/>
               </a:rPr>
-              <a:t>33 → 코스피 전체. 선행조건: P1-1로 커버리지 프레임 확보 후</a:t>
+              <a:t>소각하지 않은 자사주를 환원으로 볼 것인가 — 소각 금액 수집 완료, 두 기준을 나란히 서빙 중. 채택은 정책 판단</a:t>
             </a:r>
             <a:endParaRPr lang="en-US" sz="1200" dirty="0"/>
           </a:p>
@@ -3428,6 +3468,10 @@
           </a:solidFill>
           <a:ln/>
         </p:spPr>
+        <p:txBody>
+          <a:bodyPr/>
+          <a:p/>
+        </p:txBody>
       </p:sp>
       <p:sp>
         <p:nvSpPr>
@@ -3476,7 +3520,7 @@
                 <a:ea typeface="Malgun Gothic" pitchFamily="34" charset="-122"/>
                 <a:cs typeface="Malgun Gothic" pitchFamily="34" charset="-120"/>
               </a:rPr>
-              <a:t>성능 최적화·매크로 확장 — IPA 과잉주의 구역, 유니버스 확대 전까지 보류</a:t>
+              <a:t>성능 최적화 — 실측 결과 처방 자체가 틀렸다(원인은 페이지 깊이가 아니라 사전 집계). 실행 안 한 것이 이득</a:t>
             </a:r>
             <a:endParaRPr lang="en-US" sz="1300" dirty="0"/>
           </a:p>
@@ -3529,7 +3573,7 @@
                 <a:ea typeface="Malgun Gothic" pitchFamily="34" charset="-122"/>
                 <a:cs typeface="Malgun Gothic" pitchFamily="34" charset="-120"/>
               </a:rPr>
-              <a:t>HEART 재채점 UJ-1</a:t>
+              <a:t>완료 5건 — 커버리지·목표파싱·유니버스·소각시점·야심도</a:t>
             </a:r>
             <a:endParaRPr lang="en-US" sz="1300" dirty="0"/>
           </a:p>
@@ -3546,7 +3590,7 @@
                 <a:ea typeface="Malgun Gothic" pitchFamily="34" charset="-122"/>
                 <a:cs typeface="Malgun Gothic" pitchFamily="34" charset="-120"/>
               </a:rPr>
-              <a:t>Task Success 3.0 → 4.0</a:t>
+              <a:t>채점 12 → 174종목 · 업종 내 비교 0 → 73%</a:t>
             </a:r>
             <a:endParaRPr lang="en-US" sz="1300" dirty="0"/>
           </a:p>
@@ -3605,6 +3649,10 @@
           </a:solidFill>
           <a:ln/>
         </p:spPr>
+        <p:txBody>
+          <a:bodyPr/>
+          <a:p/>
+        </p:txBody>
       </p:sp>
       <p:sp>
         <p:nvSpPr>
@@ -3838,7 +3886,7 @@
                 <a:ea typeface="Malgun Gothic" pitchFamily="34" charset="-122"/>
                 <a:cs typeface="Malgun Gothic" pitchFamily="34" charset="-120"/>
               </a:rPr>
-              <a:t>교차검증의 습관</a:t>
+              <a:t>자기검증의 습관</a:t>
             </a:r>
             <a:endParaRPr lang="en-US" sz="2100" dirty="0"/>
           </a:p>
@@ -3877,7 +3925,7 @@
                 <a:ea typeface="Malgun Gothic" pitchFamily="34" charset="-122"/>
                 <a:cs typeface="Malgun Gothic" pitchFamily="34" charset="-120"/>
               </a:rPr>
-              <a:t>모델 교차 리뷰 · 배선 실증 · CX 3방법론 — 검증을 워크플로우로</a:t>
+              <a:t>모델 교차 리뷰 · 배선 실증 · 착수 전 재측정 — 내 지표까지 의심 대상에 둔다</a:t>
             </a:r>
             <a:endParaRPr lang="en-US" sz="1350" dirty="0"/>
           </a:p>
@@ -3996,7 +4044,7 @@
                 <a:ea typeface="Malgun Gothic" pitchFamily="34" charset="-122"/>
                 <a:cs typeface="Malgun Gothic" pitchFamily="34" charset="-120"/>
               </a:rPr>
-              <a:t>구현하지 않은 것도 근거와 함께 문서화 — 마감 결정 2건, 한계 5항목</a:t>
+              <a:t>구현하지 않은 것도, 폐기한 지표도 근거와 함께 문서화</a:t>
             </a:r>
             <a:endParaRPr lang="en-US" sz="1350" dirty="0"/>
           </a:p>
@@ -4023,6 +4071,10 @@
           </a:solidFill>
           <a:ln/>
         </p:spPr>
+        <p:txBody>
+          <a:bodyPr/>
+          <a:p/>
+        </p:txBody>
       </p:sp>
       <p:sp>
         <p:nvSpPr>
@@ -4071,7 +4123,7 @@
                 <a:ea typeface="Malgun Gothic" pitchFamily="34" charset="-122"/>
                 <a:cs typeface="Malgun Gothic" pitchFamily="34" charset="-120"/>
               </a:rPr>
-              <a:t>GitHub(코드·스토리 22건·리뷰 번들·회고 3건)  ·  Tableau .twbx(더블클릭 실행)  ·  Figma(UI·CX 시각화)  ·  CX 분석 문서</a:t>
+              <a:t>GitHub(코드·스토리 33건·리뷰 번들·회고)  ·  Tableau .twbx(더블클릭 실행)  ·  Figma(UI·CX 시각화)  ·  CX 분석 문서</a:t>
             </a:r>
             <a:endParaRPr lang="en-US" sz="1300" dirty="0"/>
           </a:p>
@@ -4208,6 +4260,10 @@
           </a:solidFill>
           <a:ln/>
         </p:spPr>
+        <p:txBody>
+          <a:bodyPr/>
+          <a:p/>
+        </p:txBody>
       </p:sp>
       <p:sp>
         <p:nvSpPr>
@@ -4347,6 +4403,10 @@
           </a:solidFill>
           <a:ln/>
         </p:spPr>
+        <p:txBody>
+          <a:bodyPr/>
+          <a:p/>
+        </p:txBody>
       </p:sp>
       <p:sp>
         <p:nvSpPr>
@@ -4486,6 +4546,10 @@
           </a:solidFill>
           <a:ln/>
         </p:spPr>
+        <p:txBody>
+          <a:bodyPr/>
+          <a:p/>
+        </p:txBody>
       </p:sp>
       <p:sp>
         <p:nvSpPr>
@@ -4802,6 +4866,10 @@
           </a:solidFill>
           <a:ln/>
         </p:spPr>
+        <p:txBody>
+          <a:bodyPr/>
+          <a:p/>
+        </p:txBody>
       </p:sp>
       <p:sp>
         <p:nvSpPr>
@@ -4958,6 +5026,10 @@
           </a:solidFill>
           <a:ln/>
         </p:spPr>
+        <p:txBody>
+          <a:bodyPr/>
+          <a:p/>
+        </p:txBody>
       </p:sp>
       <p:sp>
         <p:nvSpPr>
@@ -5031,7 +5103,7 @@
                 <a:ea typeface="Malgun Gothic" pitchFamily="34" charset="-122"/>
                 <a:cs typeface="Malgun Gothic" pitchFamily="34" charset="-120"/>
               </a:rPr>
-              <a:t>ROE·PBR·EV/EBITDA</a:t>
+              <a:t>ROE·PBR·EV/EBIT</a:t>
             </a:r>
             <a:endParaRPr lang="en-US" sz="1050" dirty="0"/>
           </a:p>
@@ -5114,6 +5186,10 @@
           </a:solidFill>
           <a:ln/>
         </p:spPr>
+        <p:txBody>
+          <a:bodyPr/>
+          <a:p/>
+        </p:txBody>
       </p:sp>
       <p:sp>
         <p:nvSpPr>
@@ -5270,6 +5346,10 @@
           </a:solidFill>
           <a:ln/>
         </p:spPr>
+        <p:txBody>
+          <a:bodyPr/>
+          <a:p/>
+        </p:txBody>
       </p:sp>
       <p:sp>
         <p:nvSpPr>
@@ -5426,6 +5506,10 @@
           </a:solidFill>
           <a:ln/>
         </p:spPr>
+        <p:txBody>
+          <a:bodyPr/>
+          <a:p/>
+        </p:txBody>
       </p:sp>
       <p:sp>
         <p:nvSpPr>
@@ -5543,6 +5627,10 @@
           </a:solidFill>
           <a:ln/>
         </p:spPr>
+        <p:txBody>
+          <a:bodyPr/>
+          <a:p/>
+        </p:txBody>
       </p:sp>
       <p:sp>
         <p:nvSpPr>
@@ -5708,7 +5796,7 @@
                 <a:ea typeface="Malgun Gothic" pitchFamily="34" charset="-122"/>
                 <a:cs typeface="Malgun Gothic" pitchFamily="34" charset="-120"/>
               </a:rPr>
-              <a:t>백엔드 246 + 프론트 56 테스트</a:t>
+              <a:t>백엔드 465 + 프론트 126 테스트</a:t>
             </a:r>
             <a:endParaRPr lang="en-US" sz="1500" dirty="0"/>
           </a:p>
@@ -5945,6 +6033,10 @@
           </a:solidFill>
           <a:ln/>
         </p:spPr>
+        <p:txBody>
+          <a:bodyPr/>
+          <a:p/>
+        </p:txBody>
       </p:sp>
       <p:sp>
         <p:nvSpPr>
@@ -6057,7 +6149,7 @@
                 <a:ea typeface="Malgun Gothic" pitchFamily="34" charset="-122"/>
                 <a:cs typeface="Malgun Gothic" pitchFamily="34" charset="-120"/>
               </a:rPr>
-              <a:t>시장·업종·시총 + ROE/PBR/EV/EBITDA/부채비율 슬라이더, 워싱 의심 토글</a:t>
+              <a:t>시장·업종·시총 + ROE/PBR/EV/EBIT/부채비율 슬라이더 + 사실 기반 필터 3종</a:t>
             </a:r>
             <a:endParaRPr lang="en-US" sz="1250" dirty="0"/>
           </a:p>
@@ -6082,6 +6174,10 @@
           </a:solidFill>
           <a:ln/>
         </p:spPr>
+        <p:txBody>
+          <a:bodyPr/>
+          <a:p/>
+        </p:txBody>
       </p:sp>
       <p:sp>
         <p:nvSpPr>
@@ -6219,6 +6315,10 @@
           </a:solidFill>
           <a:ln/>
         </p:spPr>
+        <p:txBody>
+          <a:bodyPr/>
+          <a:p/>
+        </p:txBody>
       </p:sp>
       <p:sp>
         <p:nvSpPr>
@@ -6331,7 +6431,7 @@
                 <a:ea typeface="Malgun Gothic" pitchFamily="34" charset="-122"/>
                 <a:cs typeface="Malgun Gothic" pitchFamily="34" charset="-120"/>
               </a:rPr>
-              <a:t>판단불가·미집계·미지원업종 칩이 점수와 같은 급으로 노출</a:t>
+              <a:t>판단불가·미집계·산식 미적용 칩이 점수와 같은 급으로 노출</a:t>
             </a:r>
             <a:endParaRPr lang="en-US" sz="1250" dirty="0"/>
           </a:p>
@@ -6490,6 +6590,10 @@
           </a:solidFill>
           <a:ln/>
         </p:spPr>
+        <p:txBody>
+          <a:bodyPr/>
+          <a:p/>
+        </p:txBody>
       </p:sp>
       <p:sp>
         <p:nvSpPr>
@@ -6602,7 +6706,7 @@
                 <a:ea typeface="Malgun Gothic" pitchFamily="34" charset="-122"/>
                 <a:cs typeface="Malgun Gothic" pitchFamily="34" charset="-120"/>
               </a:rPr>
-              <a:t>목표 ROE → 실제 ROE → 갭(+3.1%p), 달성률·진척률·자사주 이행</a:t>
+              <a:t>목표 → 실제 → 갭, 달성률·진척률·자사주 3단계 + 근거 공시 접수번호</a:t>
             </a:r>
             <a:endParaRPr lang="en-US" sz="1250" dirty="0"/>
           </a:p>
@@ -6627,6 +6731,10 @@
           </a:solidFill>
           <a:ln/>
         </p:spPr>
+        <p:txBody>
+          <a:bodyPr/>
+          <a:p/>
+        </p:txBody>
       </p:sp>
       <p:sp>
         <p:nvSpPr>
@@ -6764,6 +6872,10 @@
           </a:solidFill>
           <a:ln/>
         </p:spPr>
+        <p:txBody>
+          <a:bodyPr/>
+          <a:p/>
+        </p:txBody>
       </p:sp>
       <p:sp>
         <p:nvSpPr>
@@ -7013,6 +7125,10 @@
           </a:solidFill>
           <a:ln/>
         </p:spPr>
+        <p:txBody>
+          <a:bodyPr/>
+          <a:p/>
+        </p:txBody>
       </p:sp>
       <p:sp>
         <p:nvSpPr>
@@ -7247,6 +7363,10 @@
             <a:prstDash val="solid"/>
           </a:ln>
         </p:spPr>
+        <p:txBody>
+          <a:bodyPr/>
+          <a:p/>
+        </p:txBody>
       </p:sp>
       <p:sp>
         <p:nvSpPr>
@@ -7284,7 +7404,7 @@
                 <a:ea typeface="Malgun Gothic" pitchFamily="34" charset="-122"/>
                 <a:cs typeface="Malgun Gothic" pitchFamily="34" charset="-120"/>
               </a:rPr>
-              <a:t>⚠ 워싱 판정 (Kleene 3치 논리)
+              <a:t>◐ 공시 불투명도 (워싱 판정의 대체 축)
 </a:t>
             </a:r>
             <a:pPr indent="0" marL="0">
@@ -7302,7 +7422,7 @@
                 <a:ea typeface="Malgun Gothic" pitchFamily="34" charset="-122"/>
                 <a:cs typeface="Malgun Gothic" pitchFamily="34" charset="-120"/>
               </a:rPr>
-              <a:t>진척률 ≥ 0.5  &amp;  달성률 &lt; 0.6  &amp;  자사주 미이행
+              <a:t>목표 4축 중 미공시 축 수 → 동종업계 백분위 (220종목)
 </a:t>
             </a:r>
             <a:pPr indent="0" marL="0">
@@ -7320,7 +7440,7 @@
                 <a:ea typeface="Malgun Gothic" pitchFamily="34" charset="-122"/>
                 <a:cs typeface="Malgun Gothic" pitchFamily="34" charset="-120"/>
               </a:rPr>
-              <a:t>근거가 부족하면 True/False가 아니라 null(판단 불가) — 소각 확정 기업은 진척률을 몰라도 확정 False</a:t>
+              <a:t>고의를 판정하지 않고 공시 격차를 순위화 — 워싱 플래그는 실측 True=0으로 은퇴 (S7)</a:t>
             </a:r>
             <a:endParaRPr lang="en-US" sz="1400" dirty="0"/>
           </a:p>
@@ -7347,6 +7467,10 @@
           </a:solidFill>
           <a:ln/>
         </p:spPr>
+        <p:txBody>
+          <a:bodyPr/>
+          <a:p/>
+        </p:txBody>
       </p:sp>
       <p:sp>
         <p:nvSpPr>
@@ -7459,7 +7583,7 @@
                 <a:ea typeface="Malgun Gothic" pitchFamily="34" charset="-122"/>
                 <a:cs typeface="Malgun Gothic" pitchFamily="34" charset="-120"/>
               </a:rPr>
-              <a:t>저평가 (EV/EBITDA·PBR)</a:t>
+              <a:t>저평가 (EV/EBIT·PBR)</a:t>
             </a:r>
             <a:endParaRPr lang="en-US" sz="1250" dirty="0"/>
           </a:p>
@@ -7486,6 +7610,10 @@
           </a:solidFill>
           <a:ln/>
         </p:spPr>
+        <p:txBody>
+          <a:bodyPr/>
+          <a:p/>
+        </p:txBody>
       </p:sp>
       <p:sp>
         <p:nvSpPr>
@@ -7508,6 +7636,10 @@
           </a:solidFill>
           <a:ln/>
         </p:spPr>
+        <p:txBody>
+          <a:bodyPr/>
+          <a:p/>
+        </p:txBody>
       </p:sp>
       <p:sp>
         <p:nvSpPr>
@@ -7608,6 +7740,10 @@
           </a:solidFill>
           <a:ln/>
         </p:spPr>
+        <p:txBody>
+          <a:bodyPr/>
+          <a:p/>
+        </p:txBody>
       </p:sp>
       <p:sp>
         <p:nvSpPr>
@@ -7630,6 +7766,10 @@
           </a:solidFill>
           <a:ln/>
         </p:spPr>
+        <p:txBody>
+          <a:bodyPr/>
+          <a:p/>
+        </p:txBody>
       </p:sp>
       <p:sp>
         <p:nvSpPr>
@@ -7730,6 +7870,10 @@
           </a:solidFill>
           <a:ln/>
         </p:spPr>
+        <p:txBody>
+          <a:bodyPr/>
+          <a:p/>
+        </p:txBody>
       </p:sp>
       <p:sp>
         <p:nvSpPr>
@@ -7752,6 +7896,10 @@
           </a:solidFill>
           <a:ln/>
         </p:spPr>
+        <p:txBody>
+          <a:bodyPr/>
+          <a:p/>
+        </p:txBody>
       </p:sp>
       <p:sp>
         <p:nvSpPr>
@@ -7852,6 +8000,10 @@
           </a:solidFill>
           <a:ln/>
         </p:spPr>
+        <p:txBody>
+          <a:bodyPr/>
+          <a:p/>
+        </p:txBody>
       </p:sp>
       <p:sp>
         <p:nvSpPr>
@@ -7874,6 +8026,10 @@
           </a:solidFill>
           <a:ln/>
         </p:spPr>
+        <p:txBody>
+          <a:bodyPr/>
+          <a:p/>
+        </p:txBody>
       </p:sp>
       <p:sp>
         <p:nvSpPr>
@@ -8122,6 +8278,10 @@
           </a:solidFill>
           <a:ln/>
         </p:spPr>
+        <p:txBody>
+          <a:bodyPr/>
+          <a:p/>
+        </p:txBody>
       </p:sp>
       <p:sp>
         <p:nvSpPr>
@@ -8195,7 +8355,7 @@
                 <a:ea typeface="Malgun Gothic" pitchFamily="34" charset="-122"/>
                 <a:cs typeface="Malgun Gothic" pitchFamily="34" charset="-120"/>
               </a:rPr>
-              <a:t>워싱 의심 · 근거 없음 · 판단 불가 · 산출 불가 · 미집계 · 미지원 업종 — 각각 다른 시각 언어</a:t>
+              <a:t>공시 불투명 · 근거 없음 · 판단 불가 · 산출 불가 · 미집계 · 산식 미적용 — 각각 다른 시각 언어</a:t>
             </a:r>
             <a:endParaRPr lang="en-US" sz="1200" dirty="0"/>
           </a:p>
@@ -8222,6 +8382,10 @@
           </a:solidFill>
           <a:ln/>
         </p:spPr>
+        <p:txBody>
+          <a:bodyPr/>
+          <a:p/>
+        </p:txBody>
       </p:sp>
       <p:sp>
         <p:nvSpPr>
@@ -8256,7 +8420,7 @@
                 <a:ea typeface="Malgun Gothic" pitchFamily="34" charset="-122"/>
                 <a:cs typeface="Malgun Gothic" pitchFamily="34" charset="-120"/>
               </a:rPr>
-              <a:t>실데이터 검증 (33종목)</a:t>
+              <a:t>자기검증 — 간판 지표를 폐기했다</a:t>
             </a:r>
             <a:endParaRPr lang="en-US" sz="1550" dirty="0"/>
           </a:p>
@@ -8295,7 +8459,7 @@
                 <a:ea typeface="Malgun Gothic" pitchFamily="34" charset="-122"/>
                 <a:cs typeface="Malgun Gothic" pitchFamily="34" charset="-120"/>
               </a:rPr>
-              <a:t>근거 없음 18 · 판단 불가 8 · 워싱 확정 0 — 오탐을 만들지 않는 게 설계 목표 (카운터메트릭 SM-C2)</a:t>
+              <a:t>워싱 플래그 True 0건. 표본 33→359 확장 후에도 0 — 임계치가 아니라 설계 결함. 대체 축 구축 후 은퇴</a:t>
             </a:r>
             <a:endParaRPr lang="en-US" sz="1200" dirty="0"/>
           </a:p>
@@ -8322,6 +8486,10 @@
           </a:solidFill>
           <a:ln/>
         </p:spPr>
+        <p:txBody>
+          <a:bodyPr/>
+          <a:p/>
+        </p:txBody>
       </p:sp>
       <p:sp>
         <p:nvSpPr>
@@ -8532,6 +8700,10 @@
           </a:solidFill>
           <a:ln/>
         </p:spPr>
+        <p:txBody>
+          <a:bodyPr/>
+          <a:p/>
+        </p:txBody>
       </p:sp>
       <p:sp>
         <p:nvSpPr>
@@ -8566,7 +8738,7 @@
                 <a:ea typeface="Malgun Gothic" pitchFamily="34" charset="-122"/>
                 <a:cs typeface="Malgun Gothic" pitchFamily="34" charset="-120"/>
               </a:rPr>
-              <a:t>22 / 22</a:t>
+              <a:t>33 / 33</a:t>
             </a:r>
             <a:endParaRPr lang="en-US" sz="3400" dirty="0"/>
           </a:p>
@@ -8671,6 +8843,10 @@
           </a:solidFill>
           <a:ln/>
         </p:spPr>
+        <p:txBody>
+          <a:bodyPr/>
+          <a:p/>
+        </p:txBody>
       </p:sp>
       <p:sp>
         <p:nvSpPr>
@@ -8705,7 +8881,7 @@
                 <a:ea typeface="Malgun Gothic" pitchFamily="34" charset="-122"/>
                 <a:cs typeface="Malgun Gothic" pitchFamily="34" charset="-120"/>
               </a:rPr>
-              <a:t>302</a:t>
+              <a:t>591</a:t>
             </a:r>
             <a:endParaRPr lang="en-US" sz="3400" dirty="0"/>
           </a:p>
@@ -8783,7 +8959,7 @@
                 <a:ea typeface="Malgun Gothic" pitchFamily="34" charset="-122"/>
                 <a:cs typeface="Malgun Gothic" pitchFamily="34" charset="-120"/>
               </a:rPr>
-              <a:t>백엔드 246 + 프론트 56</a:t>
+              <a:t>백엔드 465 + 프론트 126</a:t>
             </a:r>
             <a:endParaRPr lang="en-US" sz="1150" dirty="0"/>
           </a:p>
@@ -8810,6 +8986,10 @@
           </a:solidFill>
           <a:ln/>
         </p:spPr>
+        <p:txBody>
+          <a:bodyPr/>
+          <a:p/>
+        </p:txBody>
       </p:sp>
       <p:sp>
         <p:nvSpPr>
@@ -9357,6 +9537,10 @@
           </a:solidFill>
           <a:ln/>
         </p:spPr>
+        <p:txBody>
+          <a:bodyPr/>
+          <a:p/>
+        </p:txBody>
       </p:sp>
       <p:sp>
         <p:nvSpPr>

--- a/docs/valueup-washing-deck.pptx
+++ b/docs/valueup-washing-deck.pptx
@@ -3108,7 +3108,7 @@
                 <a:ea typeface="Malgun Gothic" pitchFamily="34" charset="-122"/>
                 <a:cs typeface="Malgun Gothic" pitchFamily="34" charset="-120"/>
               </a:rPr>
-              <a:t>공시일(disclosure timestamp) 수집</a:t>
+              <a:t>공시일 수집 — 완료 (2026-08-04)</a:t>
             </a:r>
             <a:endParaRPr lang="en-US" sz="1600" dirty="0"/>
           </a:p>
@@ -3147,7 +3147,7 @@
                 <a:ea typeface="Malgun Gothic" pitchFamily="34" charset="-122"/>
                 <a:cs typeface="Malgun Gothic" pitchFamily="34" charset="-120"/>
               </a:rPr>
-              <a:t>시점 정합의 마지막 구멍 — 과거 as_of 조회 시 동일연도 후속 분기 혼입 가능. API 문서에 명시 중</a:t>
+              <a:t>연도 휴리스틱 → 실제 공시일(사업보고서 rcept_dt) 기준으로 전환. 706/706 수집, 차단 규칙 6곳 복제 → 단일 정의처 이관</a:t>
             </a:r>
             <a:endParaRPr lang="en-US" sz="1200" dirty="0"/>
           </a:p>
@@ -3573,7 +3573,7 @@
                 <a:ea typeface="Malgun Gothic" pitchFamily="34" charset="-122"/>
                 <a:cs typeface="Malgun Gothic" pitchFamily="34" charset="-120"/>
               </a:rPr>
-              <a:t>완료 5건 — 커버리지·목표파싱·유니버스·소각시점·야심도</a:t>
+              <a:t>완료 6건 — 커버리지·목표파싱·유니버스·소각시점·야심도·공시일</a:t>
             </a:r>
             <a:endParaRPr lang="en-US" sz="1300" dirty="0"/>
           </a:p>
@@ -3590,7 +3590,7 @@
                 <a:ea typeface="Malgun Gothic" pitchFamily="34" charset="-122"/>
                 <a:cs typeface="Malgun Gothic" pitchFamily="34" charset="-120"/>
               </a:rPr>
-              <a:t>채점 12 → 174종목 · 업종 내 비교 0 → 73%</a:t>
+              <a:t>채점 12 → 174종목 · 업종 내 비교 0 → 73% · 잔여 2건</a:t>
             </a:r>
             <a:endParaRPr lang="en-US" sz="1300" dirty="0"/>
           </a:p>

--- a/docs/valueup-washing-deck.pptx
+++ b/docs/valueup-washing-deck.pptx
@@ -3402,7 +3402,7 @@
                 <a:ea typeface="Malgun Gothic" pitchFamily="34" charset="-122"/>
                 <a:cs typeface="Malgun Gothic" pitchFamily="34" charset="-120"/>
               </a:rPr>
-              <a:t>환원율 정의 재론 (정책 판단)</a:t>
+              <a:t>환원율 축 재론 — 기각 (2026-08-04)</a:t>
             </a:r>
             <a:endParaRPr lang="en-US" sz="1600" dirty="0"/>
           </a:p>
@@ -3441,7 +3441,7 @@
                 <a:ea typeface="Malgun Gothic" pitchFamily="34" charset="-122"/>
                 <a:cs typeface="Malgun Gothic" pitchFamily="34" charset="-120"/>
               </a:rPr>
-              <a:t>소각하지 않은 자사주를 환원으로 볼 것인가 — 소각 금액 수집 완료, 두 기준을 나란히 서빙 중. 채택은 정책 판단</a:t>
+              <a:t>소각 금액 수집 후 재론 → 전역 교체 기각. 기업마다 환원율 정의가 달라(매입/소각 병기 vs 소각만) 한 자로 바꾸면 하지 않은 약속으로 채점된다</a:t>
             </a:r>
             <a:endParaRPr lang="en-US" sz="1200" dirty="0"/>
           </a:p>
@@ -3573,7 +3573,7 @@
                 <a:ea typeface="Malgun Gothic" pitchFamily="34" charset="-122"/>
                 <a:cs typeface="Malgun Gothic" pitchFamily="34" charset="-120"/>
               </a:rPr>
-              <a:t>완료 6건 — 커버리지·목표파싱·유니버스·소각시점·야심도·공시일</a:t>
+              <a:t>완료 6건 + 기각 1건(근거 기록)</a:t>
             </a:r>
             <a:endParaRPr lang="en-US" sz="1300" dirty="0"/>
           </a:p>
@@ -3590,7 +3590,7 @@
                 <a:ea typeface="Malgun Gothic" pitchFamily="34" charset="-122"/>
                 <a:cs typeface="Malgun Gothic" pitchFamily="34" charset="-120"/>
               </a:rPr>
-              <a:t>채점 12 → 174종목 · 업종 내 비교 0 → 73% · 잔여 2건</a:t>
+              <a:t>채점 12 → 174종목 · 업종 내 비교 0 → 73% · 잔여 1건(첨부 수집)</a:t>
             </a:r>
             <a:endParaRPr lang="en-US" sz="1300" dirty="0"/>
           </a:p>
